--- a/dist/sunum/iki-boyutta-hareket.pptx
+++ b/dist/sunum/iki-boyutta-hareket.pptx
@@ -7524,7 +7524,7 @@
                 <a:ea typeface="Calibri" pitchFamily="34" charset="-122"/>
                 <a:cs typeface="Calibri" pitchFamily="34" charset="-120"/>
               </a:rPr>
-              <a:t>FİZİK · KİNEMATİK</a:t>
+              <a:t>KUVVET VE HAREKET · KONU 03</a:t>
             </a:r>
             <a:endParaRPr lang="en-US" sz="1300" dirty="0"/>
           </a:p>
@@ -8733,7 +8733,7 @@
                 <a:ea typeface="Calibri" pitchFamily="34" charset="-122"/>
                 <a:cs typeface="Calibri" pitchFamily="34" charset="-120"/>
               </a:rPr>
-              <a:t>İki boyutta sabit ivmeli hareket · dersler.perinet.org</a:t>
+              <a:t>Kuvvet ve Hareket · Konu 03 · İki boyutta sabit ivmeli hareket</a:t>
             </a:r>
             <a:endParaRPr lang="en-US" sz="1050" dirty="0"/>
           </a:p>
@@ -9699,7 +9699,7 @@
                 <a:ea typeface="Calibri" pitchFamily="34" charset="-122"/>
                 <a:cs typeface="Calibri" pitchFamily="34" charset="-120"/>
               </a:rPr>
-              <a:t>İki boyutta sabit ivmeli hareket · dersler.perinet.org</a:t>
+              <a:t>Kuvvet ve Hareket · Konu 03 · İki boyutta sabit ivmeli hareket</a:t>
             </a:r>
             <a:endParaRPr lang="en-US" sz="1050" dirty="0"/>
           </a:p>
@@ -10829,7 +10829,7 @@
                 <a:ea typeface="Calibri" pitchFamily="34" charset="-122"/>
                 <a:cs typeface="Calibri" pitchFamily="34" charset="-120"/>
               </a:rPr>
-              <a:t>İki boyutta sabit ivmeli hareket · dersler.perinet.org</a:t>
+              <a:t>Kuvvet ve Hareket · Konu 03 · İki boyutta sabit ivmeli hareket</a:t>
             </a:r>
             <a:endParaRPr lang="en-US" sz="1050" dirty="0"/>
           </a:p>
@@ -12221,7 +12221,7 @@
                 <a:ea typeface="Calibri" pitchFamily="34" charset="-122"/>
                 <a:cs typeface="Calibri" pitchFamily="34" charset="-120"/>
               </a:rPr>
-              <a:t>İki boyutta sabit ivmeli hareket · dersler.perinet.org</a:t>
+              <a:t>Kuvvet ve Hareket · Konu 03 · İki boyutta sabit ivmeli hareket</a:t>
             </a:r>
             <a:endParaRPr lang="en-US" sz="1050" dirty="0"/>
           </a:p>
@@ -14136,7 +14136,7 @@
                 <a:ea typeface="Calibri" pitchFamily="34" charset="-122"/>
                 <a:cs typeface="Calibri" pitchFamily="34" charset="-120"/>
               </a:rPr>
-              <a:t>İki boyutta sabit ivmeli hareket · dersler.perinet.org</a:t>
+              <a:t>Kuvvet ve Hareket · Konu 03 · İki boyutta sabit ivmeli hareket</a:t>
             </a:r>
             <a:endParaRPr lang="en-US" sz="1050" dirty="0"/>
           </a:p>
@@ -15205,7 +15205,7 @@
                 <a:ea typeface="Calibri" pitchFamily="34" charset="-122"/>
                 <a:cs typeface="Calibri" pitchFamily="34" charset="-120"/>
               </a:rPr>
-              <a:t>İki boyutta sabit ivmeli hareket · dersler.perinet.org</a:t>
+              <a:t>Kuvvet ve Hareket · Konu 03 · İki boyutta sabit ivmeli hareket</a:t>
             </a:r>
             <a:endParaRPr lang="en-US" sz="1050" dirty="0"/>
           </a:p>
@@ -16194,7 +16194,7 @@
                 <a:ea typeface="Calibri" pitchFamily="34" charset="-122"/>
                 <a:cs typeface="Calibri" pitchFamily="34" charset="-120"/>
               </a:rPr>
-              <a:t>İki boyutta sabit ivmeli hareket · dersler.perinet.org</a:t>
+              <a:t>Kuvvet ve Hareket · Konu 03 · İki boyutta sabit ivmeli hareket</a:t>
             </a:r>
             <a:endParaRPr lang="en-US" sz="1050" dirty="0"/>
           </a:p>
@@ -17461,7 +17461,7 @@
                 <a:ea typeface="Calibri" pitchFamily="34" charset="-122"/>
                 <a:cs typeface="Calibri" pitchFamily="34" charset="-120"/>
               </a:rPr>
-              <a:t>İki boyutta sabit ivmeli hareket · dersler.perinet.org</a:t>
+              <a:t>Kuvvet ve Hareket · Konu 03 · İki boyutta sabit ivmeli hareket</a:t>
             </a:r>
             <a:endParaRPr lang="en-US" sz="1050" dirty="0"/>
           </a:p>
@@ -18159,7 +18159,7 @@
                 <a:ea typeface="Calibri" pitchFamily="34" charset="-122"/>
                 <a:cs typeface="Calibri" pitchFamily="34" charset="-120"/>
               </a:rPr>
-              <a:t>İki boyutta sabit ivmeli hareket · dersler.perinet.org</a:t>
+              <a:t>Kuvvet ve Hareket · Konu 03 · İki boyutta sabit ivmeli hareket</a:t>
             </a:r>
             <a:endParaRPr lang="en-US" sz="1050" dirty="0"/>
           </a:p>
@@ -18934,7 +18934,7 @@
                 <a:ea typeface="Calibri" pitchFamily="34" charset="-122"/>
                 <a:cs typeface="Calibri" pitchFamily="34" charset="-120"/>
               </a:rPr>
-              <a:t>İki boyutta sabit ivmeli hareket · dersler.perinet.org</a:t>
+              <a:t>Kuvvet ve Hareket · Konu 03 · İki boyutta sabit ivmeli hareket</a:t>
             </a:r>
             <a:endParaRPr lang="en-US" sz="1050" dirty="0"/>
           </a:p>
@@ -19763,7 +19763,7 @@
                 <a:ea typeface="Calibri" pitchFamily="34" charset="-122"/>
                 <a:cs typeface="Calibri" pitchFamily="34" charset="-120"/>
               </a:rPr>
-              <a:t>İki boyutta sabit ivmeli hareket · dersler.perinet.org</a:t>
+              <a:t>Kuvvet ve Hareket · Konu 03 · İki boyutta sabit ivmeli hareket</a:t>
             </a:r>
             <a:endParaRPr lang="en-US" sz="1050" dirty="0"/>
           </a:p>
@@ -20247,7 +20247,7 @@
                 <a:ea typeface="Calibri" pitchFamily="34" charset="-122"/>
                 <a:cs typeface="Calibri" pitchFamily="34" charset="-120"/>
               </a:rPr>
-              <a:t>İki boyutta sabit ivmeli hareket · dersler.perinet.org</a:t>
+              <a:t>Kuvvet ve Hareket · Konu 03 · İki boyutta sabit ivmeli hareket</a:t>
             </a:r>
             <a:endParaRPr lang="en-US" sz="1050" dirty="0"/>
           </a:p>

--- a/dist/sunum/iki-boyutta-hareket.pptx
+++ b/dist/sunum/iki-boyutta-hareket.pptx
@@ -7524,7 +7524,7 @@
                 <a:ea typeface="Calibri" pitchFamily="34" charset="-122"/>
                 <a:cs typeface="Calibri" pitchFamily="34" charset="-120"/>
               </a:rPr>
-              <a:t>KUVVET VE HAREKET · KONU 03</a:t>
+              <a:t>KUVVET VE HAREKET · KONU 02</a:t>
             </a:r>
             <a:endParaRPr lang="en-US" sz="1300" dirty="0"/>
           </a:p>
@@ -8733,7 +8733,7 @@
                 <a:ea typeface="Calibri" pitchFamily="34" charset="-122"/>
                 <a:cs typeface="Calibri" pitchFamily="34" charset="-120"/>
               </a:rPr>
-              <a:t>Kuvvet ve Hareket · Konu 03 · İki boyutta sabit ivmeli hareket</a:t>
+              <a:t>Kuvvet ve Hareket · Konu 02 · İki boyutta sabit ivmeli hareket</a:t>
             </a:r>
             <a:endParaRPr lang="en-US" sz="1050" dirty="0"/>
           </a:p>
@@ -9699,7 +9699,7 @@
                 <a:ea typeface="Calibri" pitchFamily="34" charset="-122"/>
                 <a:cs typeface="Calibri" pitchFamily="34" charset="-120"/>
               </a:rPr>
-              <a:t>Kuvvet ve Hareket · Konu 03 · İki boyutta sabit ivmeli hareket</a:t>
+              <a:t>Kuvvet ve Hareket · Konu 02 · İki boyutta sabit ivmeli hareket</a:t>
             </a:r>
             <a:endParaRPr lang="en-US" sz="1050" dirty="0"/>
           </a:p>
@@ -10829,7 +10829,7 @@
                 <a:ea typeface="Calibri" pitchFamily="34" charset="-122"/>
                 <a:cs typeface="Calibri" pitchFamily="34" charset="-120"/>
               </a:rPr>
-              <a:t>Kuvvet ve Hareket · Konu 03 · İki boyutta sabit ivmeli hareket</a:t>
+              <a:t>Kuvvet ve Hareket · Konu 02 · İki boyutta sabit ivmeli hareket</a:t>
             </a:r>
             <a:endParaRPr lang="en-US" sz="1050" dirty="0"/>
           </a:p>
@@ -12221,7 +12221,7 @@
                 <a:ea typeface="Calibri" pitchFamily="34" charset="-122"/>
                 <a:cs typeface="Calibri" pitchFamily="34" charset="-120"/>
               </a:rPr>
-              <a:t>Kuvvet ve Hareket · Konu 03 · İki boyutta sabit ivmeli hareket</a:t>
+              <a:t>Kuvvet ve Hareket · Konu 02 · İki boyutta sabit ivmeli hareket</a:t>
             </a:r>
             <a:endParaRPr lang="en-US" sz="1050" dirty="0"/>
           </a:p>
@@ -14136,7 +14136,7 @@
                 <a:ea typeface="Calibri" pitchFamily="34" charset="-122"/>
                 <a:cs typeface="Calibri" pitchFamily="34" charset="-120"/>
               </a:rPr>
-              <a:t>Kuvvet ve Hareket · Konu 03 · İki boyutta sabit ivmeli hareket</a:t>
+              <a:t>Kuvvet ve Hareket · Konu 02 · İki boyutta sabit ivmeli hareket</a:t>
             </a:r>
             <a:endParaRPr lang="en-US" sz="1050" dirty="0"/>
           </a:p>
@@ -15205,7 +15205,7 @@
                 <a:ea typeface="Calibri" pitchFamily="34" charset="-122"/>
                 <a:cs typeface="Calibri" pitchFamily="34" charset="-120"/>
               </a:rPr>
-              <a:t>Kuvvet ve Hareket · Konu 03 · İki boyutta sabit ivmeli hareket</a:t>
+              <a:t>Kuvvet ve Hareket · Konu 02 · İki boyutta sabit ivmeli hareket</a:t>
             </a:r>
             <a:endParaRPr lang="en-US" sz="1050" dirty="0"/>
           </a:p>
@@ -16194,7 +16194,7 @@
                 <a:ea typeface="Calibri" pitchFamily="34" charset="-122"/>
                 <a:cs typeface="Calibri" pitchFamily="34" charset="-120"/>
               </a:rPr>
-              <a:t>Kuvvet ve Hareket · Konu 03 · İki boyutta sabit ivmeli hareket</a:t>
+              <a:t>Kuvvet ve Hareket · Konu 02 · İki boyutta sabit ivmeli hareket</a:t>
             </a:r>
             <a:endParaRPr lang="en-US" sz="1050" dirty="0"/>
           </a:p>
@@ -17461,7 +17461,7 @@
                 <a:ea typeface="Calibri" pitchFamily="34" charset="-122"/>
                 <a:cs typeface="Calibri" pitchFamily="34" charset="-120"/>
               </a:rPr>
-              <a:t>Kuvvet ve Hareket · Konu 03 · İki boyutta sabit ivmeli hareket</a:t>
+              <a:t>Kuvvet ve Hareket · Konu 02 · İki boyutta sabit ivmeli hareket</a:t>
             </a:r>
             <a:endParaRPr lang="en-US" sz="1050" dirty="0"/>
           </a:p>
@@ -18159,7 +18159,7 @@
                 <a:ea typeface="Calibri" pitchFamily="34" charset="-122"/>
                 <a:cs typeface="Calibri" pitchFamily="34" charset="-120"/>
               </a:rPr>
-              <a:t>Kuvvet ve Hareket · Konu 03 · İki boyutta sabit ivmeli hareket</a:t>
+              <a:t>Kuvvet ve Hareket · Konu 02 · İki boyutta sabit ivmeli hareket</a:t>
             </a:r>
             <a:endParaRPr lang="en-US" sz="1050" dirty="0"/>
           </a:p>
@@ -18934,7 +18934,7 @@
                 <a:ea typeface="Calibri" pitchFamily="34" charset="-122"/>
                 <a:cs typeface="Calibri" pitchFamily="34" charset="-120"/>
               </a:rPr>
-              <a:t>Kuvvet ve Hareket · Konu 03 · İki boyutta sabit ivmeli hareket</a:t>
+              <a:t>Kuvvet ve Hareket · Konu 02 · İki boyutta sabit ivmeli hareket</a:t>
             </a:r>
             <a:endParaRPr lang="en-US" sz="1050" dirty="0"/>
           </a:p>
@@ -19763,7 +19763,7 @@
                 <a:ea typeface="Calibri" pitchFamily="34" charset="-122"/>
                 <a:cs typeface="Calibri" pitchFamily="34" charset="-120"/>
               </a:rPr>
-              <a:t>Kuvvet ve Hareket · Konu 03 · İki boyutta sabit ivmeli hareket</a:t>
+              <a:t>Kuvvet ve Hareket · Konu 02 · İki boyutta sabit ivmeli hareket</a:t>
             </a:r>
             <a:endParaRPr lang="en-US" sz="1050" dirty="0"/>
           </a:p>
@@ -20247,7 +20247,7 @@
                 <a:ea typeface="Calibri" pitchFamily="34" charset="-122"/>
                 <a:cs typeface="Calibri" pitchFamily="34" charset="-120"/>
               </a:rPr>
-              <a:t>Kuvvet ve Hareket · Konu 03 · İki boyutta sabit ivmeli hareket</a:t>
+              <a:t>Kuvvet ve Hareket · Konu 02 · İki boyutta sabit ivmeli hareket</a:t>
             </a:r>
             <a:endParaRPr lang="en-US" sz="1050" dirty="0"/>
           </a:p>

--- a/dist/sunum/iki-boyutta-hareket.pptx
+++ b/dist/sunum/iki-boyutta-hareket.pptx
@@ -5248,7 +5248,7 @@
       </p:grpSpPr>
       <p:pic>
         <p:nvPicPr>
-          <p:cNvPr id="2" name="Image 0" descr="/tmp/claude-1000/-opt-dersler/8a8328c3-841c-44fa-b76f-82572d338d3d/scratchpad/d4/sek/iki-boyutta-hareket-kapak.jpg">    </p:cNvPr>
+          <p:cNvPr id="2" name="Image 0" descr="/tmp/claude-1000/-opt-dersler/8a8328c3-841c-44fa-b76f-82572d338d3d/scratchpad/d5/sek/iki-boyutta-hareket-kapak.jpg">    </p:cNvPr>
           <p:cNvPicPr>
             <a:picLocks noChangeAspect="1"/>
           </p:cNvPicPr>
@@ -5901,69 +5901,6 @@
         </p:nvSpPr>
         <p:spPr>
           <a:xfrm>
-            <a:off x="9448495" y="6309360"/>
-            <a:ext cx="2103120" cy="274320"/>
-          </a:xfrm>
-          <a:prstGeom prst="roundRect">
-            <a:avLst>
-              <a:gd name="adj" fmla="val 50000"/>
-            </a:avLst>
-          </a:prstGeom>
-          <a:solidFill>
-            <a:srgbClr val="0E1426">
-              <a:alpha val="65000"/>
-            </a:srgbClr>
-          </a:solidFill>
-          <a:ln/>
-        </p:spPr>
-      </p:sp>
-      <p:sp>
-        <p:nvSpPr>
-          <p:cNvPr id="22" name="Text 19"/>
-          <p:cNvSpPr txBox="1"/>
-          <p:nvPr/>
-        </p:nvSpPr>
-        <p:spPr>
-          <a:xfrm>
-            <a:off x="9448495" y="6309360"/>
-            <a:ext cx="2103120" cy="274320"/>
-          </a:xfrm>
-          <a:prstGeom prst="rect">
-            <a:avLst/>
-          </a:prstGeom>
-          <a:noFill/>
-          <a:ln/>
-        </p:spPr>
-        <p:txBody>
-          <a:bodyPr wrap="square" lIns="0" tIns="0" rIns="0" bIns="0" rtlCol="0" anchor="ctr"/>
-          <a:lstStyle/>
-          <a:p>
-            <a:pPr algn="ctr" indent="0" marL="0">
-              <a:buNone/>
-            </a:pPr>
-            <a:r>
-              <a:rPr lang="en-US" sz="900" dirty="0">
-                <a:solidFill>
-                  <a:srgbClr val="E4E9F5"/>
-                </a:solidFill>
-                <a:latin typeface="Calibri" pitchFamily="34" charset="0"/>
-                <a:ea typeface="Calibri" pitchFamily="34" charset="-122"/>
-                <a:cs typeface="Calibri" pitchFamily="34" charset="-120"/>
-              </a:rPr>
-              <a:t>Görsel: yapay zekâ ile üretildi</a:t>
-            </a:r>
-            <a:endParaRPr lang="en-US" sz="900" dirty="0"/>
-          </a:p>
-        </p:txBody>
-      </p:sp>
-      <p:sp>
-        <p:nvSpPr>
-          <p:cNvPr id="23" name="Shape 20"/>
-          <p:cNvSpPr/>
-          <p:nvPr/>
-        </p:nvSpPr>
-        <p:spPr>
-          <a:xfrm>
             <a:off x="640080" y="6382512"/>
             <a:ext cx="128016" cy="128016"/>
           </a:xfrm>
@@ -5980,7 +5917,7 @@
       </p:sp>
       <p:sp>
         <p:nvSpPr>
-          <p:cNvPr id="24" name="Text 21"/>
+          <p:cNvPr id="22" name="Text 19"/>
           <p:cNvSpPr txBox="1"/>
           <p:nvPr/>
         </p:nvSpPr>
@@ -8802,7 +8739,7 @@
       </p:sp>
       <p:pic>
         <p:nvPicPr>
-          <p:cNvPr id="20" name="Image 0" descr="/tmp/claude-1000/-opt-dersler/8a8328c3-841c-44fa-b76f-82572d338d3d/scratchpad/d4/sek/iki-boyutta-hareket-03.png">    </p:cNvPr>
+          <p:cNvPr id="20" name="Image 0" descr="/tmp/claude-1000/-opt-dersler/8a8328c3-841c-44fa-b76f-82572d338d3d/scratchpad/d5/sek/iki-boyutta-hareket-03.png">    </p:cNvPr>
           <p:cNvPicPr>
             <a:picLocks noChangeAspect="1"/>
           </p:cNvPicPr>
@@ -12753,7 +12690,7 @@
       </p:sp>
       <p:pic>
         <p:nvPicPr>
-          <p:cNvPr id="19" name="Image 0" descr="/tmp/claude-1000/-opt-dersler/8a8328c3-841c-44fa-b76f-82572d338d3d/scratchpad/d4/sek/iki-boyutta-hareket-04.png">    </p:cNvPr>
+          <p:cNvPr id="19" name="Image 0" descr="/tmp/claude-1000/-opt-dersler/8a8328c3-841c-44fa-b76f-82572d338d3d/scratchpad/d5/sek/iki-boyutta-hareket-04.png">    </p:cNvPr>
           <p:cNvPicPr>
             <a:picLocks noChangeAspect="1"/>
           </p:cNvPicPr>
@@ -18278,7 +18215,7 @@
       </p:sp>
       <p:pic>
         <p:nvPicPr>
-          <p:cNvPr id="20" name="Image 0" descr="/tmp/claude-1000/-opt-dersler/8a8328c3-841c-44fa-b76f-82572d338d3d/scratchpad/d4/sek/iki-boyutta-hareket-05.png">    </p:cNvPr>
+          <p:cNvPr id="20" name="Image 0" descr="/tmp/claude-1000/-opt-dersler/8a8328c3-841c-44fa-b76f-82572d338d3d/scratchpad/d5/sek/iki-boyutta-hareket-05.png">    </p:cNvPr>
           <p:cNvPicPr>
             <a:picLocks noChangeAspect="1"/>
           </p:cNvPicPr>
@@ -20664,7 +20601,7 @@
       </p:sp>
       <p:pic>
         <p:nvPicPr>
-          <p:cNvPr id="15" name="Image 0" descr="/tmp/claude-1000/-opt-dersler/8a8328c3-841c-44fa-b76f-82572d338d3d/scratchpad/d4/sek/iki-boyutta-hareket-06.png">    </p:cNvPr>
+          <p:cNvPr id="15" name="Image 0" descr="/tmp/claude-1000/-opt-dersler/8a8328c3-841c-44fa-b76f-82572d338d3d/scratchpad/d5/sek/iki-boyutta-hareket-06.png">    </p:cNvPr>
           <p:cNvPicPr>
             <a:picLocks noChangeAspect="1"/>
           </p:cNvPicPr>
@@ -24999,7 +24936,7 @@
       </p:sp>
       <p:pic>
         <p:nvPicPr>
-          <p:cNvPr id="16" name="Image 0" descr="/tmp/claude-1000/-opt-dersler/8a8328c3-841c-44fa-b76f-82572d338d3d/scratchpad/d4/sek/iki-boyutta-hareket-07.png">    </p:cNvPr>
+          <p:cNvPr id="16" name="Image 0" descr="/tmp/claude-1000/-opt-dersler/8a8328c3-841c-44fa-b76f-82572d338d3d/scratchpad/d5/sek/iki-boyutta-hareket-07.png">    </p:cNvPr>
           <p:cNvPicPr>
             <a:picLocks noChangeAspect="1"/>
           </p:cNvPicPr>
@@ -25788,7 +25725,7 @@
       </p:sp>
       <p:pic>
         <p:nvPicPr>
-          <p:cNvPr id="11" name="Image 0" descr="/tmp/claude-1000/-opt-dersler/8a8328c3-841c-44fa-b76f-82572d338d3d/scratchpad/d4/sek/iki-boyutta-hareket-uygulama-kart.jpg">    </p:cNvPr>
+          <p:cNvPr id="11" name="Image 0" descr="/tmp/claude-1000/-opt-dersler/8a8328c3-841c-44fa-b76f-82572d338d3d/scratchpad/d5/sek/iki-boyutta-hareket-uygulama-kart.jpg">    </p:cNvPr>
           <p:cNvPicPr>
             <a:picLocks noChangeAspect="1"/>
           </p:cNvPicPr>
@@ -25812,70 +25749,7 @@
       </p:pic>
       <p:sp>
         <p:nvSpPr>
-          <p:cNvPr id="12" name="Shape 9"/>
-          <p:cNvSpPr/>
-          <p:nvPr/>
-        </p:nvSpPr>
-        <p:spPr>
-          <a:xfrm>
-            <a:off x="9704527" y="4198925"/>
-            <a:ext cx="1755648" cy="246888"/>
-          </a:xfrm>
-          <a:prstGeom prst="roundRect">
-            <a:avLst>
-              <a:gd name="adj" fmla="val 48148"/>
-            </a:avLst>
-          </a:prstGeom>
-          <a:solidFill>
-            <a:srgbClr val="0E1426">
-              <a:alpha val="60000"/>
-            </a:srgbClr>
-          </a:solidFill>
-          <a:ln/>
-        </p:spPr>
-      </p:sp>
-      <p:sp>
-        <p:nvSpPr>
-          <p:cNvPr id="13" name="Text 10"/>
-          <p:cNvSpPr txBox="1"/>
-          <p:nvPr/>
-        </p:nvSpPr>
-        <p:spPr>
-          <a:xfrm>
-            <a:off x="9704527" y="4198925"/>
-            <a:ext cx="1755648" cy="246888"/>
-          </a:xfrm>
-          <a:prstGeom prst="rect">
-            <a:avLst/>
-          </a:prstGeom>
-          <a:noFill/>
-          <a:ln/>
-        </p:spPr>
-        <p:txBody>
-          <a:bodyPr wrap="square" lIns="0" tIns="0" rIns="0" bIns="0" rtlCol="0" anchor="ctr"/>
-          <a:lstStyle/>
-          <a:p>
-            <a:pPr algn="ctr" indent="0" marL="0">
-              <a:buNone/>
-            </a:pPr>
-            <a:r>
-              <a:rPr lang="en-US" sz="850" dirty="0">
-                <a:solidFill>
-                  <a:srgbClr val="FFFFFF"/>
-                </a:solidFill>
-                <a:latin typeface="Calibri" pitchFamily="34" charset="0"/>
-                <a:ea typeface="Calibri" pitchFamily="34" charset="-122"/>
-                <a:cs typeface="Calibri" pitchFamily="34" charset="-120"/>
-              </a:rPr>
-              <a:t>Yapay zekâ ile üretildi</a:t>
-            </a:r>
-            <a:endParaRPr lang="en-US" sz="850" dirty="0"/>
-          </a:p>
-        </p:txBody>
-      </p:sp>
-      <p:sp>
-        <p:nvSpPr>
-          <p:cNvPr id="14" name="Text 11"/>
+          <p:cNvPr id="12" name="Text 9"/>
           <p:cNvSpPr txBox="1"/>
           <p:nvPr/>
         </p:nvSpPr>
@@ -25934,7 +25808,7 @@
       </p:sp>
       <p:sp>
         <p:nvSpPr>
-          <p:cNvPr id="15" name="Shape 12"/>
+          <p:cNvPr id="13" name="Shape 10"/>
           <p:cNvSpPr/>
           <p:nvPr/>
         </p:nvSpPr>
@@ -25956,7 +25830,7 @@
       </p:sp>
       <p:sp>
         <p:nvSpPr>
-          <p:cNvPr id="16" name="Text 13"/>
+          <p:cNvPr id="14" name="Text 11"/>
           <p:cNvSpPr txBox="1"/>
           <p:nvPr/>
         </p:nvSpPr>
@@ -25995,7 +25869,7 @@
       </p:sp>
       <p:sp>
         <p:nvSpPr>
-          <p:cNvPr id="17" name="Text 14"/>
+          <p:cNvPr id="15" name="Text 12"/>
           <p:cNvSpPr txBox="1"/>
           <p:nvPr/>
         </p:nvSpPr>
@@ -37346,7 +37220,7 @@
       </p:sp>
       <p:pic>
         <p:nvPicPr>
-          <p:cNvPr id="10" name="Image 0" descr="/tmp/claude-1000/-opt-dersler/8a8328c3-841c-44fa-b76f-82572d338d3d/scratchpad/d4/sek/iki-boyutta-hareket-gunluk-kart.jpg">    </p:cNvPr>
+          <p:cNvPr id="10" name="Image 0" descr="/tmp/claude-1000/-opt-dersler/8a8328c3-841c-44fa-b76f-82572d338d3d/scratchpad/d5/sek/iki-boyutta-hareket-gunluk-kart.jpg">    </p:cNvPr>
           <p:cNvPicPr>
             <a:picLocks noChangeAspect="1"/>
           </p:cNvPicPr>
@@ -37370,70 +37244,7 @@
       </p:pic>
       <p:sp>
         <p:nvSpPr>
-          <p:cNvPr id="11" name="Shape 8"/>
-          <p:cNvSpPr/>
-          <p:nvPr/>
-        </p:nvSpPr>
-        <p:spPr>
-          <a:xfrm>
-            <a:off x="9704527" y="4198925"/>
-            <a:ext cx="1755648" cy="246888"/>
-          </a:xfrm>
-          <a:prstGeom prst="roundRect">
-            <a:avLst>
-              <a:gd name="adj" fmla="val 48148"/>
-            </a:avLst>
-          </a:prstGeom>
-          <a:solidFill>
-            <a:srgbClr val="0E1426">
-              <a:alpha val="60000"/>
-            </a:srgbClr>
-          </a:solidFill>
-          <a:ln/>
-        </p:spPr>
-      </p:sp>
-      <p:sp>
-        <p:nvSpPr>
-          <p:cNvPr id="12" name="Text 9"/>
-          <p:cNvSpPr txBox="1"/>
-          <p:nvPr/>
-        </p:nvSpPr>
-        <p:spPr>
-          <a:xfrm>
-            <a:off x="9704527" y="4198925"/>
-            <a:ext cx="1755648" cy="246888"/>
-          </a:xfrm>
-          <a:prstGeom prst="rect">
-            <a:avLst/>
-          </a:prstGeom>
-          <a:noFill/>
-          <a:ln/>
-        </p:spPr>
-        <p:txBody>
-          <a:bodyPr wrap="square" lIns="0" tIns="0" rIns="0" bIns="0" rtlCol="0" anchor="ctr"/>
-          <a:lstStyle/>
-          <a:p>
-            <a:pPr algn="ctr" indent="0" marL="0">
-              <a:buNone/>
-            </a:pPr>
-            <a:r>
-              <a:rPr lang="en-US" sz="850" dirty="0">
-                <a:solidFill>
-                  <a:srgbClr val="FFFFFF"/>
-                </a:solidFill>
-                <a:latin typeface="Calibri" pitchFamily="34" charset="0"/>
-                <a:ea typeface="Calibri" pitchFamily="34" charset="-122"/>
-                <a:cs typeface="Calibri" pitchFamily="34" charset="-120"/>
-              </a:rPr>
-              <a:t>Yapay zekâ ile üretildi</a:t>
-            </a:r>
-            <a:endParaRPr lang="en-US" sz="850" dirty="0"/>
-          </a:p>
-        </p:txBody>
-      </p:sp>
-      <p:sp>
-        <p:nvSpPr>
-          <p:cNvPr id="13" name="Text 10"/>
+          <p:cNvPr id="11" name="Text 8"/>
           <p:cNvSpPr txBox="1"/>
           <p:nvPr/>
         </p:nvSpPr>
@@ -37509,7 +37320,7 @@
       </p:sp>
       <p:sp>
         <p:nvSpPr>
-          <p:cNvPr id="14" name="Shape 11"/>
+          <p:cNvPr id="12" name="Shape 9"/>
           <p:cNvSpPr/>
           <p:nvPr/>
         </p:nvSpPr>
@@ -37531,7 +37342,7 @@
       </p:sp>
       <p:sp>
         <p:nvSpPr>
-          <p:cNvPr id="15" name="Text 12"/>
+          <p:cNvPr id="13" name="Text 10"/>
           <p:cNvSpPr txBox="1"/>
           <p:nvPr/>
         </p:nvSpPr>
@@ -37570,7 +37381,7 @@
       </p:sp>
       <p:sp>
         <p:nvSpPr>
-          <p:cNvPr id="16" name="Text 13"/>
+          <p:cNvPr id="14" name="Text 11"/>
           <p:cNvSpPr txBox="1"/>
           <p:nvPr/>
         </p:nvSpPr>
@@ -50141,7 +49952,7 @@
       </p:sp>
       <p:pic>
         <p:nvPicPr>
-          <p:cNvPr id="14" name="Image 0" descr="/tmp/claude-1000/-opt-dersler/8a8328c3-841c-44fa-b76f-82572d338d3d/scratchpad/d4/sek/iki-boyutta-hareket-01.png">    </p:cNvPr>
+          <p:cNvPr id="14" name="Image 0" descr="/tmp/claude-1000/-opt-dersler/8a8328c3-841c-44fa-b76f-82572d338d3d/scratchpad/d5/sek/iki-boyutta-hareket-01.png">    </p:cNvPr>
           <p:cNvPicPr>
             <a:picLocks noChangeAspect="1"/>
           </p:cNvPicPr>
@@ -51008,7 +50819,7 @@
       </p:sp>
       <p:pic>
         <p:nvPicPr>
-          <p:cNvPr id="14" name="Image 0" descr="/tmp/claude-1000/-opt-dersler/8a8328c3-841c-44fa-b76f-82572d338d3d/scratchpad/d4/sek/iki-boyutta-hareket-02.png">    </p:cNvPr>
+          <p:cNvPr id="14" name="Image 0" descr="/tmp/claude-1000/-opt-dersler/8a8328c3-841c-44fa-b76f-82572d338d3d/scratchpad/d5/sek/iki-boyutta-hareket-02.png">    </p:cNvPr>
           <p:cNvPicPr>
             <a:picLocks noChangeAspect="1"/>
           </p:cNvPicPr>
